--- a/docs/2026-2/cea055-estatistica-probabilidade/07-variaveis-aleatorias-discretas/arquivos/Aula_07_Variaveis_Aleatorias_Discretas_SITE.pptx
+++ b/docs/2026-2/cea055-estatistica-probabilidade/07-variaveis-aleatorias-discretas/arquivos/Aula_07_Variaveis_Aleatorias_Discretas_SITE.pptx
@@ -243,7 +243,7 @@
           <a:p>
             <a:fld id="{44623A65-BD25-40B6-8815-498297225DF7}" type="datetimeFigureOut">
               <a:rPr lang="pt-BR" smtClean="0"/>
-              <a:t>16/09/2026</a:t>
+              <a:t>22/10/2026</a:t>
             </a:fld>
             <a:endParaRPr lang="pt-BR" dirty="0"/>
           </a:p>
@@ -657,7 +657,7 @@
           <a:p>
             <a:fld id="{5B45E566-B383-4B2D-B951-1136FD38326E}" type="datetimeFigureOut">
               <a:rPr lang="pt-BR" smtClean="0"/>
-              <a:t>16/09/2026</a:t>
+              <a:t>22/10/2026</a:t>
             </a:fld>
             <a:endParaRPr lang="pt-BR" dirty="0"/>
           </a:p>
@@ -855,7 +855,7 @@
           <a:p>
             <a:fld id="{5B45E566-B383-4B2D-B951-1136FD38326E}" type="datetimeFigureOut">
               <a:rPr lang="pt-BR" smtClean="0"/>
-              <a:t>16/09/2026</a:t>
+              <a:t>22/10/2026</a:t>
             </a:fld>
             <a:endParaRPr lang="pt-BR" dirty="0"/>
           </a:p>
@@ -1063,7 +1063,7 @@
           <a:p>
             <a:fld id="{5B45E566-B383-4B2D-B951-1136FD38326E}" type="datetimeFigureOut">
               <a:rPr lang="pt-BR" smtClean="0"/>
-              <a:t>16/09/2026</a:t>
+              <a:t>22/10/2026</a:t>
             </a:fld>
             <a:endParaRPr lang="pt-BR" dirty="0"/>
           </a:p>
@@ -1261,7 +1261,7 @@
           <a:p>
             <a:fld id="{5B45E566-B383-4B2D-B951-1136FD38326E}" type="datetimeFigureOut">
               <a:rPr lang="pt-BR" smtClean="0"/>
-              <a:t>16/09/2026</a:t>
+              <a:t>22/10/2026</a:t>
             </a:fld>
             <a:endParaRPr lang="pt-BR" dirty="0"/>
           </a:p>
@@ -1536,7 +1536,7 @@
           <a:p>
             <a:fld id="{5B45E566-B383-4B2D-B951-1136FD38326E}" type="datetimeFigureOut">
               <a:rPr lang="pt-BR" smtClean="0"/>
-              <a:t>16/09/2026</a:t>
+              <a:t>22/10/2026</a:t>
             </a:fld>
             <a:endParaRPr lang="pt-BR" dirty="0"/>
           </a:p>
@@ -1801,7 +1801,7 @@
           <a:p>
             <a:fld id="{5B45E566-B383-4B2D-B951-1136FD38326E}" type="datetimeFigureOut">
               <a:rPr lang="pt-BR" smtClean="0"/>
-              <a:t>16/09/2026</a:t>
+              <a:t>22/10/2026</a:t>
             </a:fld>
             <a:endParaRPr lang="pt-BR" dirty="0"/>
           </a:p>
@@ -2213,7 +2213,7 @@
           <a:p>
             <a:fld id="{5B45E566-B383-4B2D-B951-1136FD38326E}" type="datetimeFigureOut">
               <a:rPr lang="pt-BR" smtClean="0"/>
-              <a:t>16/09/2026</a:t>
+              <a:t>22/10/2026</a:t>
             </a:fld>
             <a:endParaRPr lang="pt-BR" dirty="0"/>
           </a:p>
@@ -2354,7 +2354,7 @@
           <a:p>
             <a:fld id="{5B45E566-B383-4B2D-B951-1136FD38326E}" type="datetimeFigureOut">
               <a:rPr lang="pt-BR" smtClean="0"/>
-              <a:t>16/09/2026</a:t>
+              <a:t>22/10/2026</a:t>
             </a:fld>
             <a:endParaRPr lang="pt-BR" dirty="0"/>
           </a:p>
@@ -2467,7 +2467,7 @@
           <a:p>
             <a:fld id="{5B45E566-B383-4B2D-B951-1136FD38326E}" type="datetimeFigureOut">
               <a:rPr lang="pt-BR" smtClean="0"/>
-              <a:t>16/09/2026</a:t>
+              <a:t>22/10/2026</a:t>
             </a:fld>
             <a:endParaRPr lang="pt-BR" dirty="0"/>
           </a:p>
@@ -2778,7 +2778,7 @@
           <a:p>
             <a:fld id="{5B45E566-B383-4B2D-B951-1136FD38326E}" type="datetimeFigureOut">
               <a:rPr lang="pt-BR" smtClean="0"/>
-              <a:t>16/09/2026</a:t>
+              <a:t>22/10/2026</a:t>
             </a:fld>
             <a:endParaRPr lang="pt-BR" dirty="0"/>
           </a:p>
@@ -3066,7 +3066,7 @@
           <a:p>
             <a:fld id="{5B45E566-B383-4B2D-B951-1136FD38326E}" type="datetimeFigureOut">
               <a:rPr lang="pt-BR" smtClean="0"/>
-              <a:t>16/09/2026</a:t>
+              <a:t>22/10/2026</a:t>
             </a:fld>
             <a:endParaRPr lang="pt-BR" dirty="0"/>
           </a:p>
@@ -3331,7 +3331,7 @@
           <a:p>
             <a:fld id="{5B45E566-B383-4B2D-B951-1136FD38326E}" type="datetimeFigureOut">
               <a:rPr lang="pt-BR" smtClean="0"/>
-              <a:t>16/09/2026</a:t>
+              <a:t>22/10/2026</a:t>
             </a:fld>
             <a:endParaRPr lang="pt-BR" dirty="0"/>
           </a:p>
@@ -3904,15 +3904,23 @@
             </a:pPr>
             <a:r>
               <a:rPr lang="pt-BR" sz="2400" dirty="0"/>
-              <a:t>Montgomery, Runger. </a:t>
-            </a:r>
-            <a:r>
-              <a:rPr lang="pt-BR" sz="2400" b="1" dirty="0"/>
-              <a:t>Applied Statistics and Probability for Engineers</a:t>
+              <a:t>Montgomery, Runger</a:t>
+            </a:r>
+            <a:r>
+              <a:rPr lang="pt-BR" sz="2400"/>
+              <a:t>. </a:t>
+            </a:r>
+            <a:r>
+              <a:rPr lang="pt-BR" sz="2400" b="1"/>
+              <a:t>Estatística Aplicada e Probabilidade para Engenheiros</a:t>
+            </a:r>
+            <a:r>
+              <a:rPr lang="pt-BR" sz="2400"/>
+              <a:t>, 7ª ed. — </a:t>
             </a:r>
             <a:r>
               <a:rPr lang="pt-BR" sz="2400" dirty="0"/>
-              <a:t>, 7th ed — Cap. 3 (3.1, 3.3)</a:t>
+              <a:t>Cap. 3 (3.1, 3.3)</a:t>
             </a:r>
           </a:p>
           <a:p>
@@ -4716,7 +4724,13 @@
                           <a:rPr lang="pt-BR" sz="2800" b="0" i="1" smtClean="0">
                             <a:latin typeface="Cambria Math" panose="02040503050406030204" pitchFamily="18" charset="0"/>
                           </a:rPr>
-                          <m:t>=0</m:t>
+                          <m:t>=</m:t>
+                        </m:r>
+                        <m:r>
+                          <a:rPr lang="pt-BR" sz="2800" b="0" i="1" smtClean="0">
+                            <a:latin typeface="Cambria Math" panose="02040503050406030204" pitchFamily="18" charset="0"/>
+                          </a:rPr>
+                          <m:t>0</m:t>
                         </m:r>
                       </m:e>
                     </m:d>
@@ -4724,7 +4738,31 @@
                       <a:rPr lang="pt-BR" sz="2800" b="0" i="1" smtClean="0">
                         <a:latin typeface="Cambria Math" panose="02040503050406030204" pitchFamily="18" charset="0"/>
                       </a:rPr>
-                      <m:t>=1/10,</m:t>
+                      <m:t>=</m:t>
+                    </m:r>
+                    <m:r>
+                      <a:rPr lang="pt-BR" sz="2800" b="0" i="1" smtClean="0">
+                        <a:latin typeface="Cambria Math" panose="02040503050406030204" pitchFamily="18" charset="0"/>
+                      </a:rPr>
+                      <m:t>1</m:t>
+                    </m:r>
+                    <m:r>
+                      <a:rPr lang="pt-BR" sz="2800" b="0" i="1" smtClean="0">
+                        <a:latin typeface="Cambria Math" panose="02040503050406030204" pitchFamily="18" charset="0"/>
+                      </a:rPr>
+                      <m:t>/</m:t>
+                    </m:r>
+                    <m:r>
+                      <a:rPr lang="pt-BR" sz="2800" b="0" i="1" smtClean="0">
+                        <a:latin typeface="Cambria Math" panose="02040503050406030204" pitchFamily="18" charset="0"/>
+                      </a:rPr>
+                      <m:t>10</m:t>
+                    </m:r>
+                    <m:r>
+                      <a:rPr lang="pt-BR" sz="2800" b="0" i="1" smtClean="0">
+                        <a:latin typeface="Cambria Math" panose="02040503050406030204" pitchFamily="18" charset="0"/>
+                      </a:rPr>
+                      <m:t>,</m:t>
                     </m:r>
                   </m:oMath>
                 </a14:m>
@@ -4765,7 +4803,13 @@
                           <a:rPr lang="pt-BR" sz="2800" b="0" i="1" smtClean="0">
                             <a:latin typeface="Cambria Math" panose="02040503050406030204" pitchFamily="18" charset="0"/>
                           </a:rPr>
-                          <m:t>=1</m:t>
+                          <m:t>=</m:t>
+                        </m:r>
+                        <m:r>
+                          <a:rPr lang="pt-BR" sz="2800" b="0" i="1" smtClean="0">
+                            <a:latin typeface="Cambria Math" panose="02040503050406030204" pitchFamily="18" charset="0"/>
+                          </a:rPr>
+                          <m:t>1</m:t>
                         </m:r>
                       </m:e>
                     </m:d>
@@ -4773,7 +4817,25 @@
                       <a:rPr lang="pt-BR" sz="2800" b="0" i="1" smtClean="0">
                         <a:latin typeface="Cambria Math" panose="02040503050406030204" pitchFamily="18" charset="0"/>
                       </a:rPr>
-                      <m:t>=6/10</m:t>
+                      <m:t>=</m:t>
+                    </m:r>
+                    <m:r>
+                      <a:rPr lang="pt-BR" sz="2800" b="0" i="1" smtClean="0">
+                        <a:latin typeface="Cambria Math" panose="02040503050406030204" pitchFamily="18" charset="0"/>
+                      </a:rPr>
+                      <m:t>6</m:t>
+                    </m:r>
+                    <m:r>
+                      <a:rPr lang="pt-BR" sz="2800" b="0" i="1" smtClean="0">
+                        <a:latin typeface="Cambria Math" panose="02040503050406030204" pitchFamily="18" charset="0"/>
+                      </a:rPr>
+                      <m:t>/</m:t>
+                    </m:r>
+                    <m:r>
+                      <a:rPr lang="pt-BR" sz="2800" b="0" i="1" smtClean="0">
+                        <a:latin typeface="Cambria Math" panose="02040503050406030204" pitchFamily="18" charset="0"/>
+                      </a:rPr>
+                      <m:t>10</m:t>
                     </m:r>
                   </m:oMath>
                 </a14:m>
@@ -4817,7 +4879,13 @@
                           <a:rPr lang="pt-BR" sz="2800" b="0" i="1" smtClean="0">
                             <a:latin typeface="Cambria Math" panose="02040503050406030204" pitchFamily="18" charset="0"/>
                           </a:rPr>
-                          <m:t>=2</m:t>
+                          <m:t>=</m:t>
+                        </m:r>
+                        <m:r>
+                          <a:rPr lang="pt-BR" sz="2800" b="0" i="1" smtClean="0">
+                            <a:latin typeface="Cambria Math" panose="02040503050406030204" pitchFamily="18" charset="0"/>
+                          </a:rPr>
+                          <m:t>2</m:t>
                         </m:r>
                       </m:e>
                     </m:d>
@@ -4825,7 +4893,31 @@
                       <a:rPr lang="pt-BR" sz="2800" b="0" i="1" smtClean="0">
                         <a:latin typeface="Cambria Math" panose="02040503050406030204" pitchFamily="18" charset="0"/>
                       </a:rPr>
-                      <m:t>=3/10.</m:t>
+                      <m:t>=</m:t>
+                    </m:r>
+                    <m:r>
+                      <a:rPr lang="pt-BR" sz="2800" b="0" i="1" smtClean="0">
+                        <a:latin typeface="Cambria Math" panose="02040503050406030204" pitchFamily="18" charset="0"/>
+                      </a:rPr>
+                      <m:t>3</m:t>
+                    </m:r>
+                    <m:r>
+                      <a:rPr lang="pt-BR" sz="2800" b="0" i="1" smtClean="0">
+                        <a:latin typeface="Cambria Math" panose="02040503050406030204" pitchFamily="18" charset="0"/>
+                      </a:rPr>
+                      <m:t>/</m:t>
+                    </m:r>
+                    <m:r>
+                      <a:rPr lang="pt-BR" sz="2800" b="0" i="1" smtClean="0">
+                        <a:latin typeface="Cambria Math" panose="02040503050406030204" pitchFamily="18" charset="0"/>
+                      </a:rPr>
+                      <m:t>10</m:t>
+                    </m:r>
+                    <m:r>
+                      <a:rPr lang="pt-BR" sz="2800" b="0" i="1" smtClean="0">
+                        <a:latin typeface="Cambria Math" panose="02040503050406030204" pitchFamily="18" charset="0"/>
+                      </a:rPr>
+                      <m:t>.</m:t>
                     </m:r>
                   </m:oMath>
                 </a14:m>
@@ -5893,7 +5985,13 @@
                               <a:rPr lang="pt-BR" sz="2800" b="0" i="1" smtClean="0">
                                 <a:latin typeface="Cambria Math" panose="02040503050406030204" pitchFamily="18" charset="0"/>
                               </a:rPr>
-                              <m:t>=1</m:t>
+                              <m:t>=</m:t>
+                            </m:r>
+                            <m:r>
+                              <a:rPr lang="pt-BR" sz="2800" b="0" i="1" smtClean="0">
+                                <a:latin typeface="Cambria Math" panose="02040503050406030204" pitchFamily="18" charset="0"/>
+                              </a:rPr>
+                              <m:t>1</m:t>
                             </m:r>
                           </m:sub>
                           <m:sup>
@@ -5963,7 +6061,13 @@
                           <a:rPr lang="pt-BR" sz="2800" b="0" i="1" smtClean="0">
                             <a:latin typeface="Cambria Math" panose="02040503050406030204" pitchFamily="18" charset="0"/>
                           </a:rPr>
-                          <m:t>=1</m:t>
+                          <m:t>=</m:t>
+                        </m:r>
+                        <m:r>
+                          <a:rPr lang="pt-BR" sz="2800" b="0" i="1" smtClean="0">
+                            <a:latin typeface="Cambria Math" panose="02040503050406030204" pitchFamily="18" charset="0"/>
+                          </a:rPr>
+                          <m:t>1</m:t>
                         </m:r>
                       </m:sub>
                       <m:sup>
@@ -6225,7 +6329,19 @@
                       <a:rPr lang="pt-BR" sz="2800" b="0" i="1" smtClean="0">
                         <a:latin typeface="Cambria Math" panose="02040503050406030204" pitchFamily="18" charset="0"/>
                       </a:rPr>
-                      <m:t>=0.</m:t>
+                      <m:t>=</m:t>
+                    </m:r>
+                    <m:r>
+                      <a:rPr lang="pt-BR" sz="2800" b="0" i="1" smtClean="0">
+                        <a:latin typeface="Cambria Math" panose="02040503050406030204" pitchFamily="18" charset="0"/>
+                      </a:rPr>
+                      <m:t>0</m:t>
+                    </m:r>
+                    <m:r>
+                      <a:rPr lang="pt-BR" sz="2800" b="0" i="1" smtClean="0">
+                        <a:latin typeface="Cambria Math" panose="02040503050406030204" pitchFamily="18" charset="0"/>
+                      </a:rPr>
+                      <m:t>.</m:t>
                     </m:r>
                   </m:oMath>
                 </a14:m>
@@ -6466,115 +6582,241 @@
                         <a:rPr lang="pt-BR" sz="2400" i="1" dirty="0" smtClean="0">
                           <a:latin typeface="Cambria Math" panose="02040503050406030204" pitchFamily="18" charset="0"/>
                         </a:rPr>
-                        <m:t>1→1, </m:t>
-                      </m:r>
-                      <m:r>
-                        <a:rPr lang="pt-BR" sz="2400" b="0" i="1" dirty="0" smtClean="0">
-                          <a:latin typeface="Cambria Math" panose="02040503050406030204" pitchFamily="18" charset="0"/>
-                        </a:rPr>
-                        <m:t> </m:t>
+                        <m:t>1</m:t>
                       </m:r>
                       <m:r>
                         <a:rPr lang="pt-BR" sz="2400" i="1" dirty="0" smtClean="0">
                           <a:latin typeface="Cambria Math" panose="02040503050406030204" pitchFamily="18" charset="0"/>
                         </a:rPr>
-                        <m:t>2→2, </m:t>
-                      </m:r>
-                      <m:r>
-                        <a:rPr lang="pt-BR" sz="2400" b="0" i="1" dirty="0" smtClean="0">
-                          <a:latin typeface="Cambria Math" panose="02040503050406030204" pitchFamily="18" charset="0"/>
-                        </a:rPr>
-                        <m:t> </m:t>
+                        <m:t>→</m:t>
                       </m:r>
                       <m:r>
                         <a:rPr lang="pt-BR" sz="2400" i="1" dirty="0" smtClean="0">
                           <a:latin typeface="Cambria Math" panose="02040503050406030204" pitchFamily="18" charset="0"/>
                         </a:rPr>
-                        <m:t>3→2, </m:t>
-                      </m:r>
-                      <m:r>
-                        <a:rPr lang="pt-BR" sz="2400" b="0" i="1" dirty="0" smtClean="0">
-                          <a:latin typeface="Cambria Math" panose="02040503050406030204" pitchFamily="18" charset="0"/>
-                        </a:rPr>
-                        <m:t> </m:t>
+                        <m:t>1</m:t>
                       </m:r>
                       <m:r>
                         <a:rPr lang="pt-BR" sz="2400" i="1" dirty="0" smtClean="0">
                           <a:latin typeface="Cambria Math" panose="02040503050406030204" pitchFamily="18" charset="0"/>
                         </a:rPr>
-                        <m:t>4→3,</m:t>
-                      </m:r>
-                      <m:r>
-                        <a:rPr lang="pt-BR" sz="2400" b="0" i="1" dirty="0" smtClean="0">
-                          <a:latin typeface="Cambria Math" panose="02040503050406030204" pitchFamily="18" charset="0"/>
-                        </a:rPr>
-                        <m:t> </m:t>
+                        <m:t>,  </m:t>
                       </m:r>
                       <m:r>
                         <a:rPr lang="pt-BR" sz="2400" i="1" dirty="0" smtClean="0">
                           <a:latin typeface="Cambria Math" panose="02040503050406030204" pitchFamily="18" charset="0"/>
                         </a:rPr>
-                        <m:t> 5→2,</m:t>
-                      </m:r>
-                      <m:r>
-                        <a:rPr lang="pt-BR" sz="2400" b="0" i="1" dirty="0" smtClean="0">
-                          <a:latin typeface="Cambria Math" panose="02040503050406030204" pitchFamily="18" charset="0"/>
-                        </a:rPr>
-                        <m:t> </m:t>
+                        <m:t>2</m:t>
                       </m:r>
                       <m:r>
                         <a:rPr lang="pt-BR" sz="2400" i="1" dirty="0" smtClean="0">
                           <a:latin typeface="Cambria Math" panose="02040503050406030204" pitchFamily="18" charset="0"/>
                         </a:rPr>
-                        <m:t> 6→4, </m:t>
-                      </m:r>
-                      <m:r>
-                        <a:rPr lang="pt-BR" sz="2400" b="0" i="1" dirty="0" smtClean="0">
-                          <a:latin typeface="Cambria Math" panose="02040503050406030204" pitchFamily="18" charset="0"/>
-                        </a:rPr>
-                        <m:t> </m:t>
+                        <m:t>→</m:t>
                       </m:r>
                       <m:r>
                         <a:rPr lang="pt-BR" sz="2400" i="1" dirty="0" smtClean="0">
                           <a:latin typeface="Cambria Math" panose="02040503050406030204" pitchFamily="18" charset="0"/>
                         </a:rPr>
-                        <m:t>7→2, </m:t>
-                      </m:r>
-                      <m:r>
-                        <a:rPr lang="pt-BR" sz="2400" b="0" i="1" dirty="0" smtClean="0">
-                          <a:latin typeface="Cambria Math" panose="02040503050406030204" pitchFamily="18" charset="0"/>
-                        </a:rPr>
-                        <m:t> </m:t>
+                        <m:t>2</m:t>
                       </m:r>
                       <m:r>
                         <a:rPr lang="pt-BR" sz="2400" i="1" dirty="0" smtClean="0">
                           <a:latin typeface="Cambria Math" panose="02040503050406030204" pitchFamily="18" charset="0"/>
                         </a:rPr>
-                        <m:t>8→4, </m:t>
-                      </m:r>
-                      <m:r>
-                        <a:rPr lang="pt-BR" sz="2400" b="0" i="1" dirty="0" smtClean="0">
-                          <a:latin typeface="Cambria Math" panose="02040503050406030204" pitchFamily="18" charset="0"/>
-                        </a:rPr>
-                        <m:t> </m:t>
+                        <m:t>,  </m:t>
                       </m:r>
                       <m:r>
                         <a:rPr lang="pt-BR" sz="2400" i="1" dirty="0" smtClean="0">
                           <a:latin typeface="Cambria Math" panose="02040503050406030204" pitchFamily="18" charset="0"/>
                         </a:rPr>
-                        <m:t>9→3, </m:t>
-                      </m:r>
-                      <m:r>
-                        <a:rPr lang="pt-BR" sz="2400" b="0" i="1" dirty="0" smtClean="0">
-                          <a:latin typeface="Cambria Math" panose="02040503050406030204" pitchFamily="18" charset="0"/>
-                        </a:rPr>
-                        <m:t> </m:t>
+                        <m:t>3</m:t>
                       </m:r>
                       <m:r>
                         <a:rPr lang="pt-BR" sz="2400" i="1" dirty="0" smtClean="0">
                           <a:latin typeface="Cambria Math" panose="02040503050406030204" pitchFamily="18" charset="0"/>
                         </a:rPr>
-                        <m:t>10→4.</m:t>
+                        <m:t>→</m:t>
+                      </m:r>
+                      <m:r>
+                        <a:rPr lang="pt-BR" sz="2400" i="1" dirty="0" smtClean="0">
+                          <a:latin typeface="Cambria Math" panose="02040503050406030204" pitchFamily="18" charset="0"/>
+                        </a:rPr>
+                        <m:t>2</m:t>
+                      </m:r>
+                      <m:r>
+                        <a:rPr lang="pt-BR" sz="2400" i="1" dirty="0" smtClean="0">
+                          <a:latin typeface="Cambria Math" panose="02040503050406030204" pitchFamily="18" charset="0"/>
+                        </a:rPr>
+                        <m:t>,  </m:t>
+                      </m:r>
+                      <m:r>
+                        <a:rPr lang="pt-BR" sz="2400" i="1" dirty="0" smtClean="0">
+                          <a:latin typeface="Cambria Math" panose="02040503050406030204" pitchFamily="18" charset="0"/>
+                        </a:rPr>
+                        <m:t>4</m:t>
+                      </m:r>
+                      <m:r>
+                        <a:rPr lang="pt-BR" sz="2400" i="1" dirty="0" smtClean="0">
+                          <a:latin typeface="Cambria Math" panose="02040503050406030204" pitchFamily="18" charset="0"/>
+                        </a:rPr>
+                        <m:t>→</m:t>
+                      </m:r>
+                      <m:r>
+                        <a:rPr lang="pt-BR" sz="2400" i="1" dirty="0" smtClean="0">
+                          <a:latin typeface="Cambria Math" panose="02040503050406030204" pitchFamily="18" charset="0"/>
+                        </a:rPr>
+                        <m:t>3</m:t>
+                      </m:r>
+                      <m:r>
+                        <a:rPr lang="pt-BR" sz="2400" i="1" dirty="0" smtClean="0">
+                          <a:latin typeface="Cambria Math" panose="02040503050406030204" pitchFamily="18" charset="0"/>
+                        </a:rPr>
+                        <m:t>,  </m:t>
+                      </m:r>
+                      <m:r>
+                        <a:rPr lang="pt-BR" sz="2400" i="1" dirty="0" smtClean="0">
+                          <a:latin typeface="Cambria Math" panose="02040503050406030204" pitchFamily="18" charset="0"/>
+                        </a:rPr>
+                        <m:t>5</m:t>
+                      </m:r>
+                      <m:r>
+                        <a:rPr lang="pt-BR" sz="2400" i="1" dirty="0" smtClean="0">
+                          <a:latin typeface="Cambria Math" panose="02040503050406030204" pitchFamily="18" charset="0"/>
+                        </a:rPr>
+                        <m:t>→</m:t>
+                      </m:r>
+                      <m:r>
+                        <a:rPr lang="pt-BR" sz="2400" i="1" dirty="0" smtClean="0">
+                          <a:latin typeface="Cambria Math" panose="02040503050406030204" pitchFamily="18" charset="0"/>
+                        </a:rPr>
+                        <m:t>2</m:t>
+                      </m:r>
+                      <m:r>
+                        <a:rPr lang="pt-BR" sz="2400" i="1" dirty="0" smtClean="0">
+                          <a:latin typeface="Cambria Math" panose="02040503050406030204" pitchFamily="18" charset="0"/>
+                        </a:rPr>
+                        <m:t>,  </m:t>
+                      </m:r>
+                      <m:r>
+                        <a:rPr lang="pt-BR" sz="2400" i="1" dirty="0" smtClean="0">
+                          <a:latin typeface="Cambria Math" panose="02040503050406030204" pitchFamily="18" charset="0"/>
+                        </a:rPr>
+                        <m:t>6</m:t>
+                      </m:r>
+                      <m:r>
+                        <a:rPr lang="pt-BR" sz="2400" i="1" dirty="0" smtClean="0">
+                          <a:latin typeface="Cambria Math" panose="02040503050406030204" pitchFamily="18" charset="0"/>
+                        </a:rPr>
+                        <m:t>→</m:t>
+                      </m:r>
+                      <m:r>
+                        <a:rPr lang="pt-BR" sz="2400" i="1" dirty="0" smtClean="0">
+                          <a:latin typeface="Cambria Math" panose="02040503050406030204" pitchFamily="18" charset="0"/>
+                        </a:rPr>
+                        <m:t>4</m:t>
+                      </m:r>
+                      <m:r>
+                        <a:rPr lang="pt-BR" sz="2400" i="1" dirty="0" smtClean="0">
+                          <a:latin typeface="Cambria Math" panose="02040503050406030204" pitchFamily="18" charset="0"/>
+                        </a:rPr>
+                        <m:t>,  </m:t>
+                      </m:r>
+                      <m:r>
+                        <a:rPr lang="pt-BR" sz="2400" i="1" dirty="0" smtClean="0">
+                          <a:latin typeface="Cambria Math" panose="02040503050406030204" pitchFamily="18" charset="0"/>
+                        </a:rPr>
+                        <m:t>7</m:t>
+                      </m:r>
+                      <m:r>
+                        <a:rPr lang="pt-BR" sz="2400" i="1" dirty="0" smtClean="0">
+                          <a:latin typeface="Cambria Math" panose="02040503050406030204" pitchFamily="18" charset="0"/>
+                        </a:rPr>
+                        <m:t>→</m:t>
+                      </m:r>
+                      <m:r>
+                        <a:rPr lang="pt-BR" sz="2400" i="1" dirty="0" smtClean="0">
+                          <a:latin typeface="Cambria Math" panose="02040503050406030204" pitchFamily="18" charset="0"/>
+                        </a:rPr>
+                        <m:t>2</m:t>
+                      </m:r>
+                      <m:r>
+                        <a:rPr lang="pt-BR" sz="2400" i="1" dirty="0" smtClean="0">
+                          <a:latin typeface="Cambria Math" panose="02040503050406030204" pitchFamily="18" charset="0"/>
+                        </a:rPr>
+                        <m:t>,  </m:t>
+                      </m:r>
+                      <m:r>
+                        <a:rPr lang="pt-BR" sz="2400" i="1" dirty="0" smtClean="0">
+                          <a:latin typeface="Cambria Math" panose="02040503050406030204" pitchFamily="18" charset="0"/>
+                        </a:rPr>
+                        <m:t>8</m:t>
+                      </m:r>
+                      <m:r>
+                        <a:rPr lang="pt-BR" sz="2400" i="1" dirty="0" smtClean="0">
+                          <a:latin typeface="Cambria Math" panose="02040503050406030204" pitchFamily="18" charset="0"/>
+                        </a:rPr>
+                        <m:t>→</m:t>
+                      </m:r>
+                      <m:r>
+                        <a:rPr lang="pt-BR" sz="2400" i="1" dirty="0" smtClean="0">
+                          <a:latin typeface="Cambria Math" panose="02040503050406030204" pitchFamily="18" charset="0"/>
+                        </a:rPr>
+                        <m:t>4</m:t>
+                      </m:r>
+                      <m:r>
+                        <a:rPr lang="pt-BR" sz="2400" i="1" dirty="0" smtClean="0">
+                          <a:latin typeface="Cambria Math" panose="02040503050406030204" pitchFamily="18" charset="0"/>
+                        </a:rPr>
+                        <m:t>,  </m:t>
+                      </m:r>
+                      <m:r>
+                        <a:rPr lang="pt-BR" sz="2400" i="1" dirty="0" smtClean="0">
+                          <a:latin typeface="Cambria Math" panose="02040503050406030204" pitchFamily="18" charset="0"/>
+                        </a:rPr>
+                        <m:t>9</m:t>
+                      </m:r>
+                      <m:r>
+                        <a:rPr lang="pt-BR" sz="2400" i="1" dirty="0" smtClean="0">
+                          <a:latin typeface="Cambria Math" panose="02040503050406030204" pitchFamily="18" charset="0"/>
+                        </a:rPr>
+                        <m:t>→</m:t>
+                      </m:r>
+                      <m:r>
+                        <a:rPr lang="pt-BR" sz="2400" i="1" dirty="0" smtClean="0">
+                          <a:latin typeface="Cambria Math" panose="02040503050406030204" pitchFamily="18" charset="0"/>
+                        </a:rPr>
+                        <m:t>3</m:t>
+                      </m:r>
+                      <m:r>
+                        <a:rPr lang="pt-BR" sz="2400" i="1" dirty="0" smtClean="0">
+                          <a:latin typeface="Cambria Math" panose="02040503050406030204" pitchFamily="18" charset="0"/>
+                        </a:rPr>
+                        <m:t>,  </m:t>
+                      </m:r>
+                      <m:r>
+                        <a:rPr lang="pt-BR" sz="2400" i="1" dirty="0" smtClean="0">
+                          <a:latin typeface="Cambria Math" panose="02040503050406030204" pitchFamily="18" charset="0"/>
+                        </a:rPr>
+                        <m:t>10</m:t>
+                      </m:r>
+                      <m:r>
+                        <a:rPr lang="pt-BR" sz="2400" i="1" dirty="0" smtClean="0">
+                          <a:latin typeface="Cambria Math" panose="02040503050406030204" pitchFamily="18" charset="0"/>
+                        </a:rPr>
+                        <m:t>→</m:t>
+                      </m:r>
+                      <m:r>
+                        <a:rPr lang="pt-BR" sz="2400" i="1" dirty="0" smtClean="0">
+                          <a:latin typeface="Cambria Math" panose="02040503050406030204" pitchFamily="18" charset="0"/>
+                        </a:rPr>
+                        <m:t>4</m:t>
+                      </m:r>
+                      <m:r>
+                        <a:rPr lang="pt-BR" sz="2400" i="1" dirty="0" smtClean="0">
+                          <a:latin typeface="Cambria Math" panose="02040503050406030204" pitchFamily="18" charset="0"/>
+                        </a:rPr>
+                        <m:t>.</m:t>
                       </m:r>
                     </m:oMath>
                   </m:oMathPara>
@@ -6615,7 +6857,175 @@
                         <a:rPr lang="pt-BR" sz="2400" i="1" dirty="0" smtClean="0">
                           <a:latin typeface="Cambria Math" panose="02040503050406030204" pitchFamily="18" charset="0"/>
                         </a:rPr>
-                        <m:t>) = (1/10)(1+2+2+3+2+4+2+4+3+4) = 27/10 = </m:t>
+                        <m:t>) = (</m:t>
+                      </m:r>
+                      <m:r>
+                        <a:rPr lang="pt-BR" sz="2400" i="1" dirty="0" smtClean="0">
+                          <a:latin typeface="Cambria Math" panose="02040503050406030204" pitchFamily="18" charset="0"/>
+                        </a:rPr>
+                        <m:t>1</m:t>
+                      </m:r>
+                      <m:r>
+                        <a:rPr lang="pt-BR" sz="2400" i="1" dirty="0" smtClean="0">
+                          <a:latin typeface="Cambria Math" panose="02040503050406030204" pitchFamily="18" charset="0"/>
+                        </a:rPr>
+                        <m:t>/</m:t>
+                      </m:r>
+                      <m:r>
+                        <a:rPr lang="pt-BR" sz="2400" i="1" dirty="0" smtClean="0">
+                          <a:latin typeface="Cambria Math" panose="02040503050406030204" pitchFamily="18" charset="0"/>
+                        </a:rPr>
+                        <m:t>10</m:t>
+                      </m:r>
+                      <m:r>
+                        <a:rPr lang="pt-BR" sz="2400" i="1" dirty="0" smtClean="0">
+                          <a:latin typeface="Cambria Math" panose="02040503050406030204" pitchFamily="18" charset="0"/>
+                        </a:rPr>
+                        <m:t>)(</m:t>
+                      </m:r>
+                      <m:r>
+                        <a:rPr lang="pt-BR" sz="2400" i="1" dirty="0" smtClean="0">
+                          <a:latin typeface="Cambria Math" panose="02040503050406030204" pitchFamily="18" charset="0"/>
+                        </a:rPr>
+                        <m:t>1</m:t>
+                      </m:r>
+                      <m:r>
+                        <a:rPr lang="pt-BR" sz="2400" i="1" dirty="0" smtClean="0">
+                          <a:latin typeface="Cambria Math" panose="02040503050406030204" pitchFamily="18" charset="0"/>
+                        </a:rPr>
+                        <m:t>+</m:t>
+                      </m:r>
+                      <m:r>
+                        <a:rPr lang="pt-BR" sz="2400" i="1" dirty="0" smtClean="0">
+                          <a:latin typeface="Cambria Math" panose="02040503050406030204" pitchFamily="18" charset="0"/>
+                        </a:rPr>
+                        <m:t>2</m:t>
+                      </m:r>
+                      <m:r>
+                        <a:rPr lang="pt-BR" sz="2400" i="1" dirty="0" smtClean="0">
+                          <a:latin typeface="Cambria Math" panose="02040503050406030204" pitchFamily="18" charset="0"/>
+                        </a:rPr>
+                        <m:t>+</m:t>
+                      </m:r>
+                      <m:r>
+                        <a:rPr lang="pt-BR" sz="2400" i="1" dirty="0" smtClean="0">
+                          <a:latin typeface="Cambria Math" panose="02040503050406030204" pitchFamily="18" charset="0"/>
+                        </a:rPr>
+                        <m:t>2</m:t>
+                      </m:r>
+                      <m:r>
+                        <a:rPr lang="pt-BR" sz="2400" i="1" dirty="0" smtClean="0">
+                          <a:latin typeface="Cambria Math" panose="02040503050406030204" pitchFamily="18" charset="0"/>
+                        </a:rPr>
+                        <m:t>+</m:t>
+                      </m:r>
+                      <m:r>
+                        <a:rPr lang="pt-BR" sz="2400" i="1" dirty="0" smtClean="0">
+                          <a:latin typeface="Cambria Math" panose="02040503050406030204" pitchFamily="18" charset="0"/>
+                        </a:rPr>
+                        <m:t>3</m:t>
+                      </m:r>
+                      <m:r>
+                        <a:rPr lang="pt-BR" sz="2400" i="1" dirty="0" smtClean="0">
+                          <a:latin typeface="Cambria Math" panose="02040503050406030204" pitchFamily="18" charset="0"/>
+                        </a:rPr>
+                        <m:t>+</m:t>
+                      </m:r>
+                      <m:r>
+                        <a:rPr lang="pt-BR" sz="2400" i="1" dirty="0" smtClean="0">
+                          <a:latin typeface="Cambria Math" panose="02040503050406030204" pitchFamily="18" charset="0"/>
+                        </a:rPr>
+                        <m:t>2</m:t>
+                      </m:r>
+                      <m:r>
+                        <a:rPr lang="pt-BR" sz="2400" i="1" dirty="0" smtClean="0">
+                          <a:latin typeface="Cambria Math" panose="02040503050406030204" pitchFamily="18" charset="0"/>
+                        </a:rPr>
+                        <m:t>+</m:t>
+                      </m:r>
+                      <m:r>
+                        <a:rPr lang="pt-BR" sz="2400" i="1" dirty="0" smtClean="0">
+                          <a:latin typeface="Cambria Math" panose="02040503050406030204" pitchFamily="18" charset="0"/>
+                        </a:rPr>
+                        <m:t>4</m:t>
+                      </m:r>
+                      <m:r>
+                        <a:rPr lang="pt-BR" sz="2400" i="1" dirty="0" smtClean="0">
+                          <a:latin typeface="Cambria Math" panose="02040503050406030204" pitchFamily="18" charset="0"/>
+                        </a:rPr>
+                        <m:t>+</m:t>
+                      </m:r>
+                      <m:r>
+                        <a:rPr lang="pt-BR" sz="2400" i="1" dirty="0" smtClean="0">
+                          <a:latin typeface="Cambria Math" panose="02040503050406030204" pitchFamily="18" charset="0"/>
+                        </a:rPr>
+                        <m:t>2</m:t>
+                      </m:r>
+                      <m:r>
+                        <a:rPr lang="pt-BR" sz="2400" i="1" dirty="0" smtClean="0">
+                          <a:latin typeface="Cambria Math" panose="02040503050406030204" pitchFamily="18" charset="0"/>
+                        </a:rPr>
+                        <m:t>+</m:t>
+                      </m:r>
+                      <m:r>
+                        <a:rPr lang="pt-BR" sz="2400" i="1" dirty="0" smtClean="0">
+                          <a:latin typeface="Cambria Math" panose="02040503050406030204" pitchFamily="18" charset="0"/>
+                        </a:rPr>
+                        <m:t>4</m:t>
+                      </m:r>
+                      <m:r>
+                        <a:rPr lang="pt-BR" sz="2400" i="1" dirty="0" smtClean="0">
+                          <a:latin typeface="Cambria Math" panose="02040503050406030204" pitchFamily="18" charset="0"/>
+                        </a:rPr>
+                        <m:t>+</m:t>
+                      </m:r>
+                      <m:r>
+                        <a:rPr lang="pt-BR" sz="2400" i="1" dirty="0" smtClean="0">
+                          <a:latin typeface="Cambria Math" panose="02040503050406030204" pitchFamily="18" charset="0"/>
+                        </a:rPr>
+                        <m:t>3</m:t>
+                      </m:r>
+                      <m:r>
+                        <a:rPr lang="pt-BR" sz="2400" i="1" dirty="0" smtClean="0">
+                          <a:latin typeface="Cambria Math" panose="02040503050406030204" pitchFamily="18" charset="0"/>
+                        </a:rPr>
+                        <m:t>+</m:t>
+                      </m:r>
+                      <m:r>
+                        <a:rPr lang="pt-BR" sz="2400" i="1" dirty="0" smtClean="0">
+                          <a:latin typeface="Cambria Math" panose="02040503050406030204" pitchFamily="18" charset="0"/>
+                        </a:rPr>
+                        <m:t>4</m:t>
+                      </m:r>
+                      <m:r>
+                        <a:rPr lang="pt-BR" sz="2400" i="1" dirty="0" smtClean="0">
+                          <a:latin typeface="Cambria Math" panose="02040503050406030204" pitchFamily="18" charset="0"/>
+                        </a:rPr>
+                        <m:t>) = </m:t>
+                      </m:r>
+                      <m:r>
+                        <a:rPr lang="pt-BR" sz="2400" i="1" dirty="0" smtClean="0">
+                          <a:latin typeface="Cambria Math" panose="02040503050406030204" pitchFamily="18" charset="0"/>
+                        </a:rPr>
+                        <m:t>27</m:t>
+                      </m:r>
+                      <m:r>
+                        <a:rPr lang="pt-BR" sz="2400" i="1" dirty="0" smtClean="0">
+                          <a:latin typeface="Cambria Math" panose="02040503050406030204" pitchFamily="18" charset="0"/>
+                        </a:rPr>
+                        <m:t>/</m:t>
+                      </m:r>
+                      <m:r>
+                        <a:rPr lang="pt-BR" sz="2400" i="1" dirty="0" smtClean="0">
+                          <a:latin typeface="Cambria Math" panose="02040503050406030204" pitchFamily="18" charset="0"/>
+                        </a:rPr>
+                        <m:t>10</m:t>
+                      </m:r>
+                      <m:r>
+                        <a:rPr lang="pt-BR" sz="2400" i="1" dirty="0" smtClean="0">
+                          <a:latin typeface="Cambria Math" panose="02040503050406030204" pitchFamily="18" charset="0"/>
+                        </a:rPr>
+                        <m:t> = </m:t>
                       </m:r>
                       <m:r>
                         <a:rPr lang="pt-BR" sz="2400" b="1" i="1" dirty="0" smtClean="0">
@@ -7000,7 +7410,13 @@
                             <a:rPr lang="pt-BR" sz="2400" i="1">
                               <a:latin typeface="Cambria Math" panose="02040503050406030204" pitchFamily="18" charset="0"/>
                             </a:rPr>
-                            <m:t>=1</m:t>
+                            <m:t>=</m:t>
+                          </m:r>
+                          <m:r>
+                            <a:rPr lang="pt-BR" sz="2400" i="1">
+                              <a:latin typeface="Cambria Math" panose="02040503050406030204" pitchFamily="18" charset="0"/>
+                            </a:rPr>
+                            <m:t>1</m:t>
                           </m:r>
                         </m:sub>
                         <m:sup>
@@ -7380,12 +7796,18 @@
                       <a:rPr lang="pt-BR" sz="2400" i="1" dirty="0">
                         <a:latin typeface="Cambria Math" panose="02040503050406030204" pitchFamily="18" charset="0"/>
                       </a:rPr>
-                      <m:t>²) − [</m:t>
+                      <m:t>²</m:t>
                     </m:r>
                     <m:r>
                       <a:rPr lang="pt-BR" sz="2400" i="1" dirty="0">
                         <a:latin typeface="Cambria Math" panose="02040503050406030204" pitchFamily="18" charset="0"/>
                       </a:rPr>
+                      <m:t>) − [</m:t>
+                    </m:r>
+                    <m:r>
+                      <a:rPr lang="pt-BR" sz="2400" i="1" dirty="0">
+                        <a:latin typeface="Cambria Math" panose="02040503050406030204" pitchFamily="18" charset="0"/>
+                      </a:rPr>
                       <m:t>𝐸</m:t>
                     </m:r>
                     <m:r>
@@ -7404,7 +7826,13 @@
                       <a:rPr lang="pt-BR" sz="2400" i="1" dirty="0">
                         <a:latin typeface="Cambria Math" panose="02040503050406030204" pitchFamily="18" charset="0"/>
                       </a:rPr>
-                      <m:t>)]²</m:t>
+                      <m:t>)]</m:t>
+                    </m:r>
+                    <m:r>
+                      <a:rPr lang="pt-BR" sz="2400" i="1" dirty="0">
+                        <a:latin typeface="Cambria Math" panose="02040503050406030204" pitchFamily="18" charset="0"/>
+                      </a:rPr>
+                      <m:t>²</m:t>
                     </m:r>
                   </m:oMath>
                 </a14:m>
@@ -10176,7 +10604,19 @@
                         <a:rPr lang="pt-BR" sz="2800" b="0" i="1" smtClean="0">
                           <a:latin typeface="Cambria Math" panose="02040503050406030204" pitchFamily="18" charset="0"/>
                         </a:rPr>
-                        <m:t>=1,…, </m:t>
+                        <m:t>=</m:t>
+                      </m:r>
+                      <m:r>
+                        <a:rPr lang="pt-BR" sz="2800" b="0" i="1" smtClean="0">
+                          <a:latin typeface="Cambria Math" panose="02040503050406030204" pitchFamily="18" charset="0"/>
+                        </a:rPr>
+                        <m:t>1</m:t>
+                      </m:r>
+                      <m:r>
+                        <a:rPr lang="pt-BR" sz="2800" b="0" i="1" smtClean="0">
+                          <a:latin typeface="Cambria Math" panose="02040503050406030204" pitchFamily="18" charset="0"/>
+                        </a:rPr>
+                        <m:t>,…, </m:t>
                       </m:r>
                       <m:r>
                         <a:rPr lang="pt-BR" sz="2800" b="0" i="1" smtClean="0">
@@ -10453,7 +10893,19 @@
                           <a:rPr lang="pt-BR" sz="2800" b="0" i="1" smtClean="0">
                             <a:latin typeface="Cambria Math" panose="02040503050406030204" pitchFamily="18" charset="0"/>
                           </a:rPr>
-                          <m:t>=1,…,</m:t>
+                          <m:t>=</m:t>
+                        </m:r>
+                        <m:r>
+                          <a:rPr lang="pt-BR" sz="2800" b="0" i="1" smtClean="0">
+                            <a:latin typeface="Cambria Math" panose="02040503050406030204" pitchFamily="18" charset="0"/>
+                          </a:rPr>
+                          <m:t>1</m:t>
+                        </m:r>
+                        <m:r>
+                          <a:rPr lang="pt-BR" sz="2800" b="0" i="1" smtClean="0">
+                            <a:latin typeface="Cambria Math" panose="02040503050406030204" pitchFamily="18" charset="0"/>
+                          </a:rPr>
+                          <m:t>,…,</m:t>
                         </m:r>
                         <m:r>
                           <a:rPr lang="pt-BR" sz="2800" b="0" i="1" smtClean="0">
@@ -10562,7 +11014,13 @@
                             <a:rPr lang="pt-BR" sz="2800" b="0" i="1" smtClean="0">
                               <a:latin typeface="Cambria Math" panose="02040503050406030204" pitchFamily="18" charset="0"/>
                             </a:rPr>
-                            <m:t>=1</m:t>
+                            <m:t>=</m:t>
+                          </m:r>
+                          <m:r>
+                            <a:rPr lang="pt-BR" sz="2800" b="0" i="1" smtClean="0">
+                              <a:latin typeface="Cambria Math" panose="02040503050406030204" pitchFamily="18" charset="0"/>
+                            </a:rPr>
+                            <m:t>1</m:t>
                           </m:r>
                         </m:sub>
                         <m:sup>
@@ -10620,7 +11078,13 @@
                             <a:rPr lang="pt-BR" sz="2800" b="0" i="1" smtClean="0">
                               <a:latin typeface="Cambria Math" panose="02040503050406030204" pitchFamily="18" charset="0"/>
                             </a:rPr>
-                            <m:t>=1</m:t>
+                            <m:t>=</m:t>
+                          </m:r>
+                          <m:r>
+                            <a:rPr lang="pt-BR" sz="2800" b="0" i="1" smtClean="0">
+                              <a:latin typeface="Cambria Math" panose="02040503050406030204" pitchFamily="18" charset="0"/>
+                            </a:rPr>
+                            <m:t>1</m:t>
                           </m:r>
                         </m:e>
                       </m:nary>
@@ -11013,7 +11477,43 @@
                       <a:rPr lang="pt-BR" sz="2800" b="0" i="1" smtClean="0">
                         <a:latin typeface="Cambria Math" panose="02040503050406030204" pitchFamily="18" charset="0"/>
                       </a:rPr>
-                      <m:t>{0,1,2}</m:t>
+                      <m:t>{</m:t>
+                    </m:r>
+                    <m:r>
+                      <a:rPr lang="pt-BR" sz="2800" b="0" i="1" smtClean="0">
+                        <a:latin typeface="Cambria Math" panose="02040503050406030204" pitchFamily="18" charset="0"/>
+                      </a:rPr>
+                      <m:t>0</m:t>
+                    </m:r>
+                    <m:r>
+                      <a:rPr lang="pt-BR" sz="2800" b="0" i="1" smtClean="0">
+                        <a:latin typeface="Cambria Math" panose="02040503050406030204" pitchFamily="18" charset="0"/>
+                      </a:rPr>
+                      <m:t>,</m:t>
+                    </m:r>
+                    <m:r>
+                      <a:rPr lang="pt-BR" sz="2800" b="0" i="1" smtClean="0">
+                        <a:latin typeface="Cambria Math" panose="02040503050406030204" pitchFamily="18" charset="0"/>
+                      </a:rPr>
+                      <m:t>1</m:t>
+                    </m:r>
+                    <m:r>
+                      <a:rPr lang="pt-BR" sz="2800" b="0" i="1" smtClean="0">
+                        <a:latin typeface="Cambria Math" panose="02040503050406030204" pitchFamily="18" charset="0"/>
+                      </a:rPr>
+                      <m:t>,</m:t>
+                    </m:r>
+                    <m:r>
+                      <a:rPr lang="pt-BR" sz="2800" b="0" i="1" smtClean="0">
+                        <a:latin typeface="Cambria Math" panose="02040503050406030204" pitchFamily="18" charset="0"/>
+                      </a:rPr>
+                      <m:t>2</m:t>
+                    </m:r>
+                    <m:r>
+                      <a:rPr lang="pt-BR" sz="2800" b="0" i="1" smtClean="0">
+                        <a:latin typeface="Cambria Math" panose="02040503050406030204" pitchFamily="18" charset="0"/>
+                      </a:rPr>
+                      <m:t>}</m:t>
                     </m:r>
                   </m:oMath>
                 </a14:m>
@@ -11211,7 +11711,19 @@
                             <a:rPr lang="pt-BR" sz="2800" b="0" i="1" smtClean="0">
                               <a:latin typeface="Cambria Math" panose="02040503050406030204" pitchFamily="18" charset="0"/>
                             </a:rPr>
-                            <m:t>1/10</m:t>
+                            <m:t>1</m:t>
+                          </m:r>
+                          <m:r>
+                            <a:rPr lang="pt-BR" sz="2800" b="0" i="1" smtClean="0">
+                              <a:latin typeface="Cambria Math" panose="02040503050406030204" pitchFamily="18" charset="0"/>
+                            </a:rPr>
+                            <m:t>/</m:t>
+                          </m:r>
+                          <m:r>
+                            <a:rPr lang="pt-BR" sz="2800" b="0" i="1" smtClean="0">
+                              <a:latin typeface="Cambria Math" panose="02040503050406030204" pitchFamily="18" charset="0"/>
+                            </a:rPr>
+                            <m:t>10</m:t>
                           </m:r>
                         </m:e>
                       </m:mr>
@@ -11237,7 +11749,19 @@
                             <a:rPr lang="pt-BR" sz="2800" b="0" i="1" smtClean="0">
                               <a:latin typeface="Cambria Math" panose="02040503050406030204" pitchFamily="18" charset="0"/>
                             </a:rPr>
-                            <m:t>6/10</m:t>
+                            <m:t>6</m:t>
+                          </m:r>
+                          <m:r>
+                            <a:rPr lang="pt-BR" sz="2800" b="0" i="1" smtClean="0">
+                              <a:latin typeface="Cambria Math" panose="02040503050406030204" pitchFamily="18" charset="0"/>
+                            </a:rPr>
+                            <m:t>/</m:t>
+                          </m:r>
+                          <m:r>
+                            <a:rPr lang="pt-BR" sz="2800" b="0" i="1" smtClean="0">
+                              <a:latin typeface="Cambria Math" panose="02040503050406030204" pitchFamily="18" charset="0"/>
+                            </a:rPr>
+                            <m:t>10</m:t>
                           </m:r>
                         </m:e>
                       </m:mr>
@@ -11263,7 +11787,19 @@
                             <a:rPr lang="pt-BR" sz="2800" b="0" i="1" smtClean="0">
                               <a:latin typeface="Cambria Math" panose="02040503050406030204" pitchFamily="18" charset="0"/>
                             </a:rPr>
-                            <m:t>3/10</m:t>
+                            <m:t>3</m:t>
+                          </m:r>
+                          <m:r>
+                            <a:rPr lang="pt-BR" sz="2800" b="0" i="1" smtClean="0">
+                              <a:latin typeface="Cambria Math" panose="02040503050406030204" pitchFamily="18" charset="0"/>
+                            </a:rPr>
+                            <m:t>/</m:t>
+                          </m:r>
+                          <m:r>
+                            <a:rPr lang="pt-BR" sz="2800" b="0" i="1" smtClean="0">
+                              <a:latin typeface="Cambria Math" panose="02040503050406030204" pitchFamily="18" charset="0"/>
+                            </a:rPr>
+                            <m:t>10</m:t>
                           </m:r>
                         </m:e>
                       </m:mr>
@@ -11552,7 +12088,13 @@
                           <a:rPr lang="pt-BR" sz="2800" b="0" i="1" smtClean="0">
                             <a:latin typeface="Cambria Math" panose="02040503050406030204" pitchFamily="18" charset="0"/>
                           </a:rPr>
-                          <m:t>=0</m:t>
+                          <m:t>=</m:t>
+                        </m:r>
+                        <m:r>
+                          <a:rPr lang="pt-BR" sz="2800" b="0" i="1" smtClean="0">
+                            <a:latin typeface="Cambria Math" panose="02040503050406030204" pitchFamily="18" charset="0"/>
+                          </a:rPr>
+                          <m:t>0</m:t>
                         </m:r>
                       </m:e>
                     </m:d>
@@ -11560,7 +12102,31 @@
                       <a:rPr lang="pt-BR" sz="2800" b="0" i="1" smtClean="0">
                         <a:latin typeface="Cambria Math" panose="02040503050406030204" pitchFamily="18" charset="0"/>
                       </a:rPr>
-                      <m:t>=1/10,</m:t>
+                      <m:t>=</m:t>
+                    </m:r>
+                    <m:r>
+                      <a:rPr lang="pt-BR" sz="2800" b="0" i="1" smtClean="0">
+                        <a:latin typeface="Cambria Math" panose="02040503050406030204" pitchFamily="18" charset="0"/>
+                      </a:rPr>
+                      <m:t>1</m:t>
+                    </m:r>
+                    <m:r>
+                      <a:rPr lang="pt-BR" sz="2800" b="0" i="1" smtClean="0">
+                        <a:latin typeface="Cambria Math" panose="02040503050406030204" pitchFamily="18" charset="0"/>
+                      </a:rPr>
+                      <m:t>/</m:t>
+                    </m:r>
+                    <m:r>
+                      <a:rPr lang="pt-BR" sz="2800" b="0" i="1" smtClean="0">
+                        <a:latin typeface="Cambria Math" panose="02040503050406030204" pitchFamily="18" charset="0"/>
+                      </a:rPr>
+                      <m:t>10</m:t>
+                    </m:r>
+                    <m:r>
+                      <a:rPr lang="pt-BR" sz="2800" b="0" i="1" smtClean="0">
+                        <a:latin typeface="Cambria Math" panose="02040503050406030204" pitchFamily="18" charset="0"/>
+                      </a:rPr>
+                      <m:t>,</m:t>
                     </m:r>
                   </m:oMath>
                 </a14:m>
@@ -11601,7 +12167,13 @@
                           <a:rPr lang="pt-BR" sz="2800" b="0" i="1" smtClean="0">
                             <a:latin typeface="Cambria Math" panose="02040503050406030204" pitchFamily="18" charset="0"/>
                           </a:rPr>
-                          <m:t>=1</m:t>
+                          <m:t>=</m:t>
+                        </m:r>
+                        <m:r>
+                          <a:rPr lang="pt-BR" sz="2800" b="0" i="1" smtClean="0">
+                            <a:latin typeface="Cambria Math" panose="02040503050406030204" pitchFamily="18" charset="0"/>
+                          </a:rPr>
+                          <m:t>1</m:t>
                         </m:r>
                       </m:e>
                     </m:d>
@@ -11609,7 +12181,25 @@
                       <a:rPr lang="pt-BR" sz="2800" b="0" i="1" smtClean="0">
                         <a:latin typeface="Cambria Math" panose="02040503050406030204" pitchFamily="18" charset="0"/>
                       </a:rPr>
-                      <m:t>=6/10</m:t>
+                      <m:t>=</m:t>
+                    </m:r>
+                    <m:r>
+                      <a:rPr lang="pt-BR" sz="2800" b="0" i="1" smtClean="0">
+                        <a:latin typeface="Cambria Math" panose="02040503050406030204" pitchFamily="18" charset="0"/>
+                      </a:rPr>
+                      <m:t>6</m:t>
+                    </m:r>
+                    <m:r>
+                      <a:rPr lang="pt-BR" sz="2800" b="0" i="1" smtClean="0">
+                        <a:latin typeface="Cambria Math" panose="02040503050406030204" pitchFamily="18" charset="0"/>
+                      </a:rPr>
+                      <m:t>/</m:t>
+                    </m:r>
+                    <m:r>
+                      <a:rPr lang="pt-BR" sz="2800" b="0" i="1" smtClean="0">
+                        <a:latin typeface="Cambria Math" panose="02040503050406030204" pitchFamily="18" charset="0"/>
+                      </a:rPr>
+                      <m:t>10</m:t>
                     </m:r>
                   </m:oMath>
                 </a14:m>
@@ -11653,7 +12243,13 @@
                           <a:rPr lang="pt-BR" sz="2800" b="0" i="1" smtClean="0">
                             <a:latin typeface="Cambria Math" panose="02040503050406030204" pitchFamily="18" charset="0"/>
                           </a:rPr>
-                          <m:t>=2</m:t>
+                          <m:t>=</m:t>
+                        </m:r>
+                        <m:r>
+                          <a:rPr lang="pt-BR" sz="2800" b="0" i="1" smtClean="0">
+                            <a:latin typeface="Cambria Math" panose="02040503050406030204" pitchFamily="18" charset="0"/>
+                          </a:rPr>
+                          <m:t>2</m:t>
                         </m:r>
                       </m:e>
                     </m:d>
@@ -11661,7 +12257,31 @@
                       <a:rPr lang="pt-BR" sz="2800" b="0" i="1" smtClean="0">
                         <a:latin typeface="Cambria Math" panose="02040503050406030204" pitchFamily="18" charset="0"/>
                       </a:rPr>
-                      <m:t>=3/10.</m:t>
+                      <m:t>=</m:t>
+                    </m:r>
+                    <m:r>
+                      <a:rPr lang="pt-BR" sz="2800" b="0" i="1" smtClean="0">
+                        <a:latin typeface="Cambria Math" panose="02040503050406030204" pitchFamily="18" charset="0"/>
+                      </a:rPr>
+                      <m:t>3</m:t>
+                    </m:r>
+                    <m:r>
+                      <a:rPr lang="pt-BR" sz="2800" b="0" i="1" smtClean="0">
+                        <a:latin typeface="Cambria Math" panose="02040503050406030204" pitchFamily="18" charset="0"/>
+                      </a:rPr>
+                      <m:t>/</m:t>
+                    </m:r>
+                    <m:r>
+                      <a:rPr lang="pt-BR" sz="2800" b="0" i="1" smtClean="0">
+                        <a:latin typeface="Cambria Math" panose="02040503050406030204" pitchFamily="18" charset="0"/>
+                      </a:rPr>
+                      <m:t>10</m:t>
+                    </m:r>
+                    <m:r>
+                      <a:rPr lang="pt-BR" sz="2800" b="0" i="1" smtClean="0">
+                        <a:latin typeface="Cambria Math" panose="02040503050406030204" pitchFamily="18" charset="0"/>
+                      </a:rPr>
+                      <m:t>.</m:t>
                     </m:r>
                   </m:oMath>
                 </a14:m>
@@ -11702,7 +12322,13 @@
                           <a:rPr lang="pt-BR" sz="2800" b="0" i="1" smtClean="0">
                             <a:latin typeface="Cambria Math" panose="02040503050406030204" pitchFamily="18" charset="0"/>
                           </a:rPr>
-                          <m:t>≤1</m:t>
+                          <m:t>≤</m:t>
+                        </m:r>
+                        <m:r>
+                          <a:rPr lang="pt-BR" sz="2800" b="0" i="1" smtClean="0">
+                            <a:latin typeface="Cambria Math" panose="02040503050406030204" pitchFamily="18" charset="0"/>
+                          </a:rPr>
+                          <m:t>1</m:t>
                         </m:r>
                       </m:e>
                     </m:d>
@@ -11710,7 +12336,25 @@
                       <a:rPr lang="pt-BR" sz="2800" b="0" i="1" smtClean="0">
                         <a:latin typeface="Cambria Math" panose="02040503050406030204" pitchFamily="18" charset="0"/>
                       </a:rPr>
-                      <m:t>=7/10</m:t>
+                      <m:t>=</m:t>
+                    </m:r>
+                    <m:r>
+                      <a:rPr lang="pt-BR" sz="2800" b="0" i="1" smtClean="0">
+                        <a:latin typeface="Cambria Math" panose="02040503050406030204" pitchFamily="18" charset="0"/>
+                      </a:rPr>
+                      <m:t>7</m:t>
+                    </m:r>
+                    <m:r>
+                      <a:rPr lang="pt-BR" sz="2800" b="0" i="1" smtClean="0">
+                        <a:latin typeface="Cambria Math" panose="02040503050406030204" pitchFamily="18" charset="0"/>
+                      </a:rPr>
+                      <m:t>/</m:t>
+                    </m:r>
+                    <m:r>
+                      <a:rPr lang="pt-BR" sz="2800" b="0" i="1" smtClean="0">
+                        <a:latin typeface="Cambria Math" panose="02040503050406030204" pitchFamily="18" charset="0"/>
+                      </a:rPr>
+                      <m:t>10</m:t>
                     </m:r>
                   </m:oMath>
                 </a14:m>
